--- a/10_要件/新環境証明書　概要設計.pptx
+++ b/10_要件/新環境証明書　概要設計.pptx
@@ -624,7 +624,7 @@
           <a:p>
             <a:fld id="{B7085599-04D7-4AC8-BE30-081BEEE781D8}" type="datetimeFigureOut">
               <a:rPr kumimoji="1" lang="ja-JP" altLang="en-US" smtClean="0"/>
-              <a:t>2026/5/8</a:t>
+              <a:t>2026/6/25</a:t>
             </a:fld>
             <a:endParaRPr kumimoji="1" lang="ja-JP" altLang="en-US"/>
           </a:p>
@@ -854,7 +854,7 @@
           <a:p>
             <a:fld id="{B7085599-04D7-4AC8-BE30-081BEEE781D8}" type="datetimeFigureOut">
               <a:rPr kumimoji="1" lang="ja-JP" altLang="en-US" smtClean="0"/>
-              <a:t>2026/5/8</a:t>
+              <a:t>2026/6/25</a:t>
             </a:fld>
             <a:endParaRPr kumimoji="1" lang="ja-JP" altLang="en-US"/>
           </a:p>
@@ -1094,7 +1094,7 @@
           <a:p>
             <a:fld id="{B7085599-04D7-4AC8-BE30-081BEEE781D8}" type="datetimeFigureOut">
               <a:rPr kumimoji="1" lang="ja-JP" altLang="en-US" smtClean="0"/>
-              <a:t>2026/5/8</a:t>
+              <a:t>2026/6/25</a:t>
             </a:fld>
             <a:endParaRPr kumimoji="1" lang="ja-JP" altLang="en-US"/>
           </a:p>
@@ -1324,7 +1324,7 @@
           <a:p>
             <a:fld id="{B7085599-04D7-4AC8-BE30-081BEEE781D8}" type="datetimeFigureOut">
               <a:rPr kumimoji="1" lang="ja-JP" altLang="en-US" smtClean="0"/>
-              <a:t>2026/5/8</a:t>
+              <a:t>2026/6/25</a:t>
             </a:fld>
             <a:endParaRPr kumimoji="1" lang="ja-JP" altLang="en-US"/>
           </a:p>
@@ -1599,7 +1599,7 @@
           <a:p>
             <a:fld id="{B7085599-04D7-4AC8-BE30-081BEEE781D8}" type="datetimeFigureOut">
               <a:rPr kumimoji="1" lang="ja-JP" altLang="en-US" smtClean="0"/>
-              <a:t>2026/5/8</a:t>
+              <a:t>2026/6/25</a:t>
             </a:fld>
             <a:endParaRPr kumimoji="1" lang="ja-JP" altLang="en-US"/>
           </a:p>
@@ -1928,7 +1928,7 @@
           <a:p>
             <a:fld id="{B7085599-04D7-4AC8-BE30-081BEEE781D8}" type="datetimeFigureOut">
               <a:rPr kumimoji="1" lang="ja-JP" altLang="en-US" smtClean="0"/>
-              <a:t>2026/5/8</a:t>
+              <a:t>2026/6/25</a:t>
             </a:fld>
             <a:endParaRPr kumimoji="1" lang="ja-JP" altLang="en-US"/>
           </a:p>
@@ -2404,7 +2404,7 @@
           <a:p>
             <a:fld id="{B7085599-04D7-4AC8-BE30-081BEEE781D8}" type="datetimeFigureOut">
               <a:rPr kumimoji="1" lang="ja-JP" altLang="en-US" smtClean="0"/>
-              <a:t>2026/5/8</a:t>
+              <a:t>2026/6/25</a:t>
             </a:fld>
             <a:endParaRPr kumimoji="1" lang="ja-JP" altLang="en-US"/>
           </a:p>
@@ -2545,7 +2545,7 @@
           <a:p>
             <a:fld id="{B7085599-04D7-4AC8-BE30-081BEEE781D8}" type="datetimeFigureOut">
               <a:rPr kumimoji="1" lang="ja-JP" altLang="en-US" smtClean="0"/>
-              <a:t>2026/5/8</a:t>
+              <a:t>2026/6/25</a:t>
             </a:fld>
             <a:endParaRPr kumimoji="1" lang="ja-JP" altLang="en-US"/>
           </a:p>
@@ -2658,7 +2658,7 @@
           <a:p>
             <a:fld id="{B7085599-04D7-4AC8-BE30-081BEEE781D8}" type="datetimeFigureOut">
               <a:rPr kumimoji="1" lang="ja-JP" altLang="en-US" smtClean="0"/>
-              <a:t>2026/5/8</a:t>
+              <a:t>2026/6/25</a:t>
             </a:fld>
             <a:endParaRPr kumimoji="1" lang="ja-JP" altLang="en-US"/>
           </a:p>
@@ -3001,7 +3001,7 @@
           <a:p>
             <a:fld id="{B7085599-04D7-4AC8-BE30-081BEEE781D8}" type="datetimeFigureOut">
               <a:rPr kumimoji="1" lang="ja-JP" altLang="en-US" smtClean="0"/>
-              <a:t>2026/5/8</a:t>
+              <a:t>2026/6/25</a:t>
             </a:fld>
             <a:endParaRPr kumimoji="1" lang="ja-JP" altLang="en-US"/>
           </a:p>
@@ -3289,7 +3289,7 @@
           <a:p>
             <a:fld id="{B7085599-04D7-4AC8-BE30-081BEEE781D8}" type="datetimeFigureOut">
               <a:rPr kumimoji="1" lang="ja-JP" altLang="en-US" smtClean="0"/>
-              <a:t>2026/5/8</a:t>
+              <a:t>2026/6/25</a:t>
             </a:fld>
             <a:endParaRPr kumimoji="1" lang="ja-JP" altLang="en-US"/>
           </a:p>
@@ -3562,7 +3562,7 @@
           <a:p>
             <a:fld id="{B7085599-04D7-4AC8-BE30-081BEEE781D8}" type="datetimeFigureOut">
               <a:rPr kumimoji="1" lang="ja-JP" altLang="en-US" smtClean="0"/>
-              <a:t>2026/5/8</a:t>
+              <a:t>2026/6/25</a:t>
             </a:fld>
             <a:endParaRPr kumimoji="1" lang="ja-JP" altLang="en-US"/>
           </a:p>
@@ -5071,7 +5071,7 @@
         <p:spPr>
           <a:xfrm>
             <a:off x="6786164" y="3984872"/>
-            <a:ext cx="3910045" cy="246221"/>
+            <a:ext cx="3938899" cy="246221"/>
           </a:xfrm>
           <a:prstGeom prst="rect">
             <a:avLst/>
@@ -5089,21 +5089,21 @@
                 <a:latin typeface="BIZ UDPゴシック" panose="020B0400000000000000" pitchFamily="50" charset="-128"/>
                 <a:ea typeface="BIZ UDPゴシック" panose="020B0400000000000000" pitchFamily="50" charset="-128"/>
               </a:rPr>
-              <a:t>成功した場合、戻り値にメールアドレス、名前、</a:t>
-            </a:r>
-            <a:r>
-              <a:rPr lang="ja-JP" altLang="en-US" sz="1000" b="1" dirty="0">
-                <a:latin typeface="BIZ UDPゴシック" panose="020B0400000000000000" pitchFamily="50" charset="-128"/>
-                <a:ea typeface="BIZ UDPゴシック" panose="020B0400000000000000" pitchFamily="50" charset="-128"/>
-              </a:rPr>
-              <a:t>（代理店名？）</a:t>
+              <a:t>成功した場合、戻り値にユーザ</a:t>
+            </a:r>
+            <a:r>
+              <a:rPr kumimoji="1" lang="en-US" altLang="ja-JP" sz="1000" b="1" dirty="0">
+                <a:latin typeface="BIZ UDPゴシック" panose="020B0400000000000000" pitchFamily="50" charset="-128"/>
+                <a:ea typeface="BIZ UDPゴシック" panose="020B0400000000000000" pitchFamily="50" charset="-128"/>
+              </a:rPr>
+              <a:t>ID</a:t>
             </a:r>
             <a:r>
               <a:rPr kumimoji="1" lang="ja-JP" altLang="en-US" sz="1000" b="1" dirty="0">
                 <a:latin typeface="BIZ UDPゴシック" panose="020B0400000000000000" pitchFamily="50" charset="-128"/>
                 <a:ea typeface="BIZ UDPゴシック" panose="020B0400000000000000" pitchFamily="50" charset="-128"/>
               </a:rPr>
-              <a:t>を取得</a:t>
+              <a:t>、メールアドレス、名前などを取得</a:t>
             </a:r>
           </a:p>
         </p:txBody>
@@ -5123,14 +5123,14 @@
           <p:nvPr>
             <p:extLst>
               <p:ext uri="{D42A27DB-BD31-4B8C-83A1-F6EECF244321}">
-                <p14:modId xmlns:p14="http://schemas.microsoft.com/office/powerpoint/2010/main" val="3402957641"/>
+                <p14:modId xmlns:p14="http://schemas.microsoft.com/office/powerpoint/2010/main" val="230180690"/>
               </p:ext>
             </p:extLst>
           </p:nvPr>
         </p:nvGraphicFramePr>
         <p:xfrm>
           <a:off x="5787935" y="4328471"/>
-          <a:ext cx="5739046" cy="426720"/>
+          <a:ext cx="3922140" cy="426720"/>
         </p:xfrm>
         <a:graphic>
           <a:graphicData uri="http://schemas.openxmlformats.org/drawingml/2006/table">
@@ -5157,13 +5157,6 @@
                   <a:extLst>
                     <a:ext uri="{9D8B030D-6E8A-4147-A177-3AD203B41FA5}">
                       <a16:colId xmlns:a16="http://schemas.microsoft.com/office/drawing/2014/main" val="807734435"/>
-                    </a:ext>
-                  </a:extLst>
-                </a:gridCol>
-                <a:gridCol w="1816906">
-                  <a:extLst>
-                    <a:ext uri="{9D8B030D-6E8A-4147-A177-3AD203B41FA5}">
-                      <a16:colId xmlns:a16="http://schemas.microsoft.com/office/drawing/2014/main" val="150458762"/>
                     </a:ext>
                   </a:extLst>
                 </a:gridCol>
@@ -5247,38 +5240,19 @@
                           <a:latin typeface="BIZ UDPゴシック" panose="020B0400000000000000" pitchFamily="50" charset="-128"/>
                           <a:ea typeface="BIZ UDPゴシック" panose="020B0400000000000000" pitchFamily="50" charset="-128"/>
                         </a:rPr>
-                        <a:t>証明書</a:t>
+                        <a:t>ユーザ</a:t>
                       </a:r>
                       <a:r>
                         <a:rPr kumimoji="1" lang="en-US" altLang="ja-JP" sz="800" dirty="0">
                           <a:latin typeface="BIZ UDPゴシック" panose="020B0400000000000000" pitchFamily="50" charset="-128"/>
                           <a:ea typeface="BIZ UDPゴシック" panose="020B0400000000000000" pitchFamily="50" charset="-128"/>
                         </a:rPr>
-                        <a:t>web</a:t>
+                        <a:t>ID</a:t>
                       </a:r>
-                      <a:r>
-                        <a:rPr kumimoji="1" lang="ja-JP" altLang="en-US" sz="800" dirty="0">
-                          <a:latin typeface="BIZ UDPゴシック" panose="020B0400000000000000" pitchFamily="50" charset="-128"/>
-                          <a:ea typeface="BIZ UDPゴシック" panose="020B0400000000000000" pitchFamily="50" charset="-128"/>
-                        </a:rPr>
-                        <a:t>認証用ハッシュコード</a:t>
-                      </a:r>
-                    </a:p>
-                  </a:txBody>
-                  <a:tcPr/>
-                </a:tc>
-                <a:tc>
-                  <a:txBody>
-                    <a:bodyPr/>
-                    <a:lstStyle/>
-                    <a:p>
-                      <a:r>
-                        <a:rPr kumimoji="1" lang="ja-JP" altLang="en-US" sz="800" dirty="0">
-                          <a:latin typeface="BIZ UDPゴシック" panose="020B0400000000000000" pitchFamily="50" charset="-128"/>
-                          <a:ea typeface="BIZ UDPゴシック" panose="020B0400000000000000" pitchFamily="50" charset="-128"/>
-                        </a:rPr>
-                        <a:t>登録日時</a:t>
-                      </a:r>
+                      <a:endParaRPr kumimoji="1" lang="ja-JP" altLang="en-US" sz="800" dirty="0">
+                        <a:latin typeface="BIZ UDPゴシック" panose="020B0400000000000000" pitchFamily="50" charset="-128"/>
+                        <a:ea typeface="BIZ UDPゴシック" panose="020B0400000000000000" pitchFamily="50" charset="-128"/>
+                      </a:endParaRPr>
                     </a:p>
                   </a:txBody>
                   <a:tcPr/>
@@ -5355,38 +5329,12 @@
                       <a:r>
                         <a:rPr kumimoji="1" lang="en-US" altLang="ja-JP" sz="800" dirty="0">
                           <a:solidFill>
-                            <a:srgbClr val="FF0000"/>
-                          </a:solidFill>
-                          <a:latin typeface="BIZ UDPゴシック" panose="020B0400000000000000" pitchFamily="50" charset="-128"/>
-                          <a:ea typeface="BIZ UDPゴシック" panose="020B0400000000000000" pitchFamily="50" charset="-128"/>
-                        </a:rPr>
-                        <a:t>3xXadsdewqfUI633sjcww</a:t>
-                      </a:r>
-                      <a:endParaRPr kumimoji="1" lang="ja-JP" altLang="en-US" sz="800" dirty="0">
-                        <a:solidFill>
-                          <a:srgbClr val="FF0000"/>
-                        </a:solidFill>
-                        <a:latin typeface="BIZ UDPゴシック" panose="020B0400000000000000" pitchFamily="50" charset="-128"/>
-                        <a:ea typeface="BIZ UDPゴシック" panose="020B0400000000000000" pitchFamily="50" charset="-128"/>
-                      </a:endParaRPr>
-                    </a:p>
-                  </a:txBody>
-                  <a:tcPr/>
-                </a:tc>
-                <a:tc>
-                  <a:txBody>
-                    <a:bodyPr/>
-                    <a:lstStyle/>
-                    <a:p>
-                      <a:r>
-                        <a:rPr kumimoji="1" lang="en-US" altLang="ja-JP" sz="800" dirty="0">
-                          <a:solidFill>
                             <a:schemeClr val="tx1"/>
                           </a:solidFill>
                           <a:latin typeface="BIZ UDPゴシック" panose="020B0400000000000000" pitchFamily="50" charset="-128"/>
                           <a:ea typeface="BIZ UDPゴシック" panose="020B0400000000000000" pitchFamily="50" charset="-128"/>
                         </a:rPr>
-                        <a:t>2026-04-03 16:38:12</a:t>
+                        <a:t>100000</a:t>
                       </a:r>
                       <a:endParaRPr kumimoji="1" lang="ja-JP" altLang="en-US" sz="800" dirty="0">
                         <a:solidFill>
@@ -5423,8 +5371,8 @@
         </p:nvSpPr>
         <p:spPr>
           <a:xfrm>
-            <a:off x="6871445" y="4971258"/>
-            <a:ext cx="2220076" cy="369302"/>
+            <a:off x="6871444" y="4971257"/>
+            <a:ext cx="2400871" cy="629771"/>
           </a:xfrm>
           <a:prstGeom prst="borderCallout1">
             <a:avLst>
@@ -5461,15 +5409,26 @@
                 <a:latin typeface="BIZ UDPゴシック" panose="020B0400000000000000" pitchFamily="50" charset="-128"/>
                 <a:ea typeface="BIZ UDPゴシック" panose="020B0400000000000000" pitchFamily="50" charset="-128"/>
               </a:rPr>
-              <a:t>ユーザー</a:t>
-            </a:r>
-            <a:r>
-              <a:rPr kumimoji="1" lang="ja-JP" altLang="en-US" sz="900" dirty="0">
-                <a:latin typeface="BIZ UDPゴシック" panose="020B0400000000000000" pitchFamily="50" charset="-128"/>
-                <a:ea typeface="BIZ UDPゴシック" panose="020B0400000000000000" pitchFamily="50" charset="-128"/>
-              </a:rPr>
-              <a:t>マスタ（ログイン）にユーザーを作成して、ログイン状態にする</a:t>
-            </a:r>
+              <a:t>成功した場合、環境証明書側でセッション管理をする。セッションタイムアウトは</a:t>
+            </a:r>
+            <a:r>
+              <a:rPr lang="en-US" altLang="ja-JP" sz="900" dirty="0">
+                <a:latin typeface="BIZ UDPゴシック" panose="020B0400000000000000" pitchFamily="50" charset="-128"/>
+                <a:ea typeface="BIZ UDPゴシック" panose="020B0400000000000000" pitchFamily="50" charset="-128"/>
+              </a:rPr>
+              <a:t>1</a:t>
+            </a:r>
+            <a:r>
+              <a:rPr lang="ja-JP" altLang="en-US" sz="900" dirty="0">
+                <a:latin typeface="BIZ UDPゴシック" panose="020B0400000000000000" pitchFamily="50" charset="-128"/>
+                <a:ea typeface="BIZ UDPゴシック" panose="020B0400000000000000" pitchFamily="50" charset="-128"/>
+              </a:rPr>
+              <a:t>日。</a:t>
+            </a:r>
+            <a:endParaRPr lang="en-US" altLang="ja-JP" sz="900" dirty="0">
+              <a:latin typeface="BIZ UDPゴシック" panose="020B0400000000000000" pitchFamily="50" charset="-128"/>
+              <a:ea typeface="BIZ UDPゴシック" panose="020B0400000000000000" pitchFamily="50" charset="-128"/>
+            </a:endParaRPr>
           </a:p>
         </p:txBody>
       </p:sp>
@@ -5585,7 +5544,7 @@
         <p:spPr>
           <a:xfrm>
             <a:off x="693978" y="4217980"/>
-            <a:ext cx="3094117" cy="553998"/>
+            <a:ext cx="3122971" cy="553998"/>
           </a:xfrm>
           <a:prstGeom prst="rect">
             <a:avLst/>
@@ -5603,14 +5562,28 @@
                 <a:latin typeface="BIZ UDPゴシック" panose="020B0400000000000000" pitchFamily="50" charset="-128"/>
                 <a:ea typeface="BIZ UDPゴシック" panose="020B0400000000000000" pitchFamily="50" charset="-128"/>
               </a:rPr>
-              <a:t>メールアドレス、名前、</a:t>
+              <a:t>ユーザ</a:t>
+            </a:r>
+            <a:r>
+              <a:rPr kumimoji="1" lang="en-US" altLang="ja-JP" sz="1000" b="1" dirty="0">
+                <a:latin typeface="BIZ UDPゴシック" panose="020B0400000000000000" pitchFamily="50" charset="-128"/>
+                <a:ea typeface="BIZ UDPゴシック" panose="020B0400000000000000" pitchFamily="50" charset="-128"/>
+              </a:rPr>
+              <a:t>ID</a:t>
+            </a:r>
+            <a:r>
+              <a:rPr kumimoji="1" lang="ja-JP" altLang="en-US" sz="1000" b="1" dirty="0">
+                <a:latin typeface="BIZ UDPゴシック" panose="020B0400000000000000" pitchFamily="50" charset="-128"/>
+                <a:ea typeface="BIZ UDPゴシック" panose="020B0400000000000000" pitchFamily="50" charset="-128"/>
+              </a:rPr>
+              <a:t>、メールアドレス、名前</a:t>
             </a:r>
             <a:r>
               <a:rPr lang="ja-JP" altLang="en-US" sz="1000" b="1" dirty="0">
                 <a:latin typeface="BIZ UDPゴシック" panose="020B0400000000000000" pitchFamily="50" charset="-128"/>
                 <a:ea typeface="BIZ UDPゴシック" panose="020B0400000000000000" pitchFamily="50" charset="-128"/>
               </a:rPr>
-              <a:t>（代理店名？）</a:t>
+              <a:t>など</a:t>
             </a:r>
             <a:r>
               <a:rPr kumimoji="1" lang="ja-JP" altLang="en-US" sz="1000" b="1" dirty="0">
@@ -5646,21 +5619,21 @@
           </a:p>
           <a:p>
             <a:r>
-              <a:rPr lang="ja-JP" altLang="en-US" sz="1000" b="1" dirty="0">
+              <a:rPr lang="ja-JP" altLang="en-US" sz="1000" b="1" strike="sngStrike" dirty="0">
                 <a:latin typeface="BIZ UDPゴシック" panose="020B0400000000000000" pitchFamily="50" charset="-128"/>
                 <a:ea typeface="BIZ UDPゴシック" panose="020B0400000000000000" pitchFamily="50" charset="-128"/>
               </a:rPr>
               <a:t>証明書</a:t>
             </a:r>
             <a:r>
-              <a:rPr lang="en-US" altLang="ja-JP" sz="1000" b="1" dirty="0">
+              <a:rPr lang="en-US" altLang="ja-JP" sz="1000" b="1" strike="sngStrike" dirty="0">
                 <a:latin typeface="BIZ UDPゴシック" panose="020B0400000000000000" pitchFamily="50" charset="-128"/>
                 <a:ea typeface="BIZ UDPゴシック" panose="020B0400000000000000" pitchFamily="50" charset="-128"/>
               </a:rPr>
               <a:t>web</a:t>
             </a:r>
             <a:r>
-              <a:rPr lang="ja-JP" altLang="en-US" sz="1000" b="1" dirty="0">
+              <a:rPr lang="ja-JP" altLang="en-US" sz="1000" b="1" strike="sngStrike" dirty="0">
                 <a:latin typeface="BIZ UDPゴシック" panose="020B0400000000000000" pitchFamily="50" charset="-128"/>
                 <a:ea typeface="BIZ UDPゴシック" panose="020B0400000000000000" pitchFamily="50" charset="-128"/>
               </a:rPr>
@@ -6243,7 +6216,7 @@
           </a:p>
           <a:p>
             <a:r>
-              <a:rPr lang="ja-JP" altLang="en-US" sz="1400" dirty="0">
+              <a:rPr lang="ja-JP" altLang="en-US" sz="1400" strike="sngStrike" dirty="0">
                 <a:solidFill>
                   <a:sysClr val="windowText" lastClr="000000"/>
                 </a:solidFill>
@@ -6251,7 +6224,7 @@
               <a:t>・必要な場合、</a:t>
             </a:r>
             <a:r>
-              <a:rPr lang="en-US" altLang="ja-JP" sz="1400" dirty="0">
+              <a:rPr lang="en-US" altLang="ja-JP" sz="1400" strike="sngStrike" dirty="0">
                 <a:solidFill>
                   <a:sysClr val="windowText" lastClr="000000"/>
                 </a:solidFill>
@@ -6259,14 +6232,14 @@
               <a:t>API</a:t>
             </a:r>
             <a:r>
-              <a:rPr lang="ja-JP" altLang="en-US" sz="1400" dirty="0">
+              <a:rPr lang="ja-JP" altLang="en-US" sz="1400" strike="sngStrike" dirty="0">
                 <a:solidFill>
                   <a:sysClr val="windowText" lastClr="000000"/>
                 </a:solidFill>
               </a:rPr>
               <a:t>をたたいてメアドなどを提供</a:t>
             </a:r>
-            <a:endParaRPr kumimoji="1" lang="ja-JP" altLang="en-US" sz="1400" dirty="0">
+            <a:endParaRPr kumimoji="1" lang="ja-JP" altLang="en-US" sz="1400" strike="sngStrike" dirty="0">
               <a:solidFill>
                 <a:sysClr val="windowText" lastClr="000000"/>
               </a:solidFill>
@@ -6607,80 +6580,6 @@
                 <a:sysClr val="windowText" lastClr="000000"/>
               </a:solidFill>
             </a:endParaRPr>
-          </a:p>
-        </p:txBody>
-      </p:sp>
-      <p:sp>
-        <p:nvSpPr>
-          <p:cNvPr id="42" name="正方形/長方形 41">
-            <a:extLst>
-              <a:ext uri="{FF2B5EF4-FFF2-40B4-BE49-F238E27FC236}">
-                <a16:creationId xmlns:a16="http://schemas.microsoft.com/office/drawing/2014/main" id="{59260605-325C-EA2E-A557-574C8AE973EA}"/>
-              </a:ext>
-            </a:extLst>
-          </p:cNvPr>
-          <p:cNvSpPr/>
-          <p:nvPr/>
-        </p:nvSpPr>
-        <p:spPr>
-          <a:xfrm>
-            <a:off x="26469" y="5558041"/>
-            <a:ext cx="2752189" cy="1153597"/>
-          </a:xfrm>
-          <a:prstGeom prst="rect">
-            <a:avLst/>
-          </a:prstGeom>
-          <a:solidFill>
-            <a:schemeClr val="accent2">
-              <a:lumMod val="20000"/>
-              <a:lumOff val="80000"/>
-            </a:schemeClr>
-          </a:solidFill>
-        </p:spPr>
-        <p:style>
-          <a:lnRef idx="2">
-            <a:schemeClr val="accent1">
-              <a:shade val="15000"/>
-            </a:schemeClr>
-          </a:lnRef>
-          <a:fillRef idx="1">
-            <a:schemeClr val="accent1"/>
-          </a:fillRef>
-          <a:effectRef idx="0">
-            <a:schemeClr val="accent1"/>
-          </a:effectRef>
-          <a:fontRef idx="minor">
-            <a:schemeClr val="lt1"/>
-          </a:fontRef>
-        </p:style>
-        <p:txBody>
-          <a:bodyPr rtlCol="0" anchor="ctr"/>
-          <a:lstStyle/>
-          <a:p>
-            <a:r>
-              <a:rPr kumimoji="1" lang="ja-JP" altLang="en-US" sz="1400" dirty="0">
-                <a:solidFill>
-                  <a:sysClr val="windowText" lastClr="000000"/>
-                </a:solidFill>
-              </a:rPr>
-              <a:t>フロントからかバックエンドからのリクエストからになるか、アーキテクチャが決まったら</a:t>
-            </a:r>
-            <a:r>
-              <a:rPr kumimoji="1" lang="en-US" altLang="ja-JP" sz="1400" dirty="0" err="1">
-                <a:solidFill>
-                  <a:sysClr val="windowText" lastClr="000000"/>
-                </a:solidFill>
-              </a:rPr>
-              <a:t>ArcStage</a:t>
-            </a:r>
-            <a:r>
-              <a:rPr kumimoji="1" lang="ja-JP" altLang="en-US" sz="1400" dirty="0">
-                <a:solidFill>
-                  <a:sysClr val="windowText" lastClr="000000"/>
-                </a:solidFill>
-              </a:rPr>
-              <a:t>さんへご連絡いただく</a:t>
-            </a:r>
           </a:p>
         </p:txBody>
       </p:sp>
